--- a/论文改稿/沈秋雨-基于GraphRAG的企业知识库检索优化研究-10分钟汇报.pptx
+++ b/论文改稿/沈秋雨-基于GraphRAG的企业知识库检索优化研究-10分钟汇报.pptx
@@ -5,10 +5,10 @@
     <p:sldMasterId id="2147483648" r:id="rId1"/>
   </p:sldMasterIdLst>
   <p:notesMasterIdLst>
-    <p:notesMasterId r:id="rId14"/>
+    <p:notesMasterId r:id="rId15"/>
   </p:notesMasterIdLst>
   <p:handoutMasterIdLst>
-    <p:handoutMasterId r:id="rId15"/>
+    <p:handoutMasterId r:id="rId16"/>
   </p:handoutMasterIdLst>
   <p:sldIdLst>
     <p:sldId id="256" r:id="rId2"/>
@@ -23,6 +23,7 @@
     <p:sldId id="265" r:id="rId11"/>
     <p:sldId id="266" r:id="rId12"/>
     <p:sldId id="267" r:id="rId13"/>
+    <p:sldId id="268" r:id="rId14"/>
   </p:sldIdLst>
   <p:sldSz cx="12192000" cy="6858000"/>
   <p:notesSz cx="6858000" cy="9144000"/>
@@ -2178,56 +2179,14 @@
           <a:p>
             <a:pPr algn="ctr"/>
             <a:r>
-              <a:rPr sz="1200" b="1" dirty="0" err="1">
+              <a:rPr sz="1000" b="1">
                 <a:solidFill>
                   <a:srgbClr val="004650"/>
                 </a:solidFill>
                 <a:latin typeface="Microsoft YaHei"/>
               </a:rPr>
-              <a:t>查具体条款</a:t>
-            </a:r>
-            <a:r>
-              <a:rPr sz="1200" b="1" dirty="0">
-                <a:solidFill>
-                  <a:srgbClr val="004650"/>
-                </a:solidFill>
-                <a:latin typeface="Microsoft YaHei"/>
-              </a:rPr>
-              <a:t> / </a:t>
-            </a:r>
-            <a:r>
-              <a:rPr sz="1200" b="1" dirty="0" err="1">
-                <a:solidFill>
-                  <a:srgbClr val="004650"/>
-                </a:solidFill>
-                <a:latin typeface="Microsoft YaHei"/>
-              </a:rPr>
-              <a:t>金额</a:t>
-            </a:r>
-            <a:r>
-              <a:rPr sz="1200" b="1" dirty="0">
-                <a:solidFill>
-                  <a:srgbClr val="004650"/>
-                </a:solidFill>
-                <a:latin typeface="Microsoft YaHei"/>
-              </a:rPr>
-              <a:t> / </a:t>
-            </a:r>
-            <a:r>
-              <a:rPr sz="1200" b="1" dirty="0" err="1">
-                <a:solidFill>
-                  <a:srgbClr val="004650"/>
-                </a:solidFill>
-                <a:latin typeface="Microsoft YaHei"/>
-              </a:rPr>
-              <a:t>期限</a:t>
-            </a:r>
-            <a:endParaRPr sz="1200" b="1" dirty="0">
-              <a:solidFill>
-                <a:srgbClr val="004650"/>
-              </a:solidFill>
-              <a:latin typeface="Microsoft YaHei"/>
-            </a:endParaRPr>
+              <a:t>查具体条款 / 金额 / 期限</a:t>
+            </a:r>
           </a:p>
         </p:txBody>
       </p:sp>
@@ -2240,7 +2199,7 @@
         <p:spPr>
           <a:xfrm>
             <a:off x="612648" y="2359152"/>
-            <a:ext cx="3337560" cy="1118255"/>
+            <a:ext cx="3337560" cy="1783080"/>
           </a:xfrm>
           <a:prstGeom prst="rect">
             <a:avLst/>
@@ -2259,7 +2218,7 @@
               </a:spcAft>
             </a:pPr>
             <a:r>
-              <a:rPr sz="1200" b="1" dirty="0">
+              <a:rPr sz="900" b="1">
                 <a:solidFill>
                   <a:srgbClr val="C29748"/>
                 </a:solidFill>
@@ -2268,7 +2227,7 @@
               <a:t>• </a:t>
             </a:r>
             <a:r>
-              <a:rPr sz="1200" dirty="0">
+              <a:rPr sz="900">
                 <a:solidFill>
                   <a:srgbClr val="19242D"/>
                 </a:solidFill>
@@ -2284,7 +2243,7 @@
               </a:spcAft>
             </a:pPr>
             <a:r>
-              <a:rPr sz="1200" b="1" dirty="0">
+              <a:rPr sz="900" b="1">
                 <a:solidFill>
                   <a:srgbClr val="C29748"/>
                 </a:solidFill>
@@ -2293,7 +2252,7 @@
               <a:t>• </a:t>
             </a:r>
             <a:r>
-              <a:rPr sz="1200" dirty="0">
+              <a:rPr sz="900">
                 <a:solidFill>
                   <a:srgbClr val="19242D"/>
                 </a:solidFill>
@@ -2309,7 +2268,7 @@
               </a:spcAft>
             </a:pPr>
             <a:r>
-              <a:rPr sz="1200" b="1" dirty="0">
+              <a:rPr sz="900" b="1">
                 <a:solidFill>
                   <a:srgbClr val="C29748"/>
                 </a:solidFill>
@@ -2318,7 +2277,7 @@
               <a:t>• </a:t>
             </a:r>
             <a:r>
-              <a:rPr sz="1200" dirty="0">
+              <a:rPr sz="900">
                 <a:solidFill>
                   <a:srgbClr val="19242D"/>
                 </a:solidFill>
@@ -2334,7 +2293,7 @@
               </a:spcAft>
             </a:pPr>
             <a:r>
-              <a:rPr sz="1200" b="1" dirty="0">
+              <a:rPr sz="900" b="1">
                 <a:solidFill>
                   <a:srgbClr val="C29748"/>
                 </a:solidFill>
@@ -2343,7 +2302,7 @@
               <a:t>• </a:t>
             </a:r>
             <a:r>
-              <a:rPr sz="1200" dirty="0">
+              <a:rPr sz="900">
                 <a:solidFill>
                   <a:srgbClr val="19242D"/>
                 </a:solidFill>
@@ -2359,7 +2318,7 @@
               </a:spcAft>
             </a:pPr>
             <a:r>
-              <a:rPr sz="1200" b="1" dirty="0">
+              <a:rPr sz="900" b="1">
                 <a:solidFill>
                   <a:srgbClr val="C29748"/>
                 </a:solidFill>
@@ -2368,7 +2327,7 @@
               <a:t>• </a:t>
             </a:r>
             <a:r>
-              <a:rPr sz="1200" dirty="0">
+              <a:rPr sz="900">
                 <a:solidFill>
                   <a:srgbClr val="19242D"/>
                 </a:solidFill>
@@ -2422,40 +2381,13 @@
           <a:p>
             <a:pPr algn="ctr"/>
             <a:r>
-              <a:rPr sz="1400" b="0" dirty="0" err="1">
+              <a:rPr sz="1000" b="0">
                 <a:solidFill>
                   <a:srgbClr val="19242D"/>
                 </a:solidFill>
                 <a:latin typeface="Microsoft YaHei"/>
               </a:rPr>
-              <a:t>说明：局部路由把问题压到属性</a:t>
-            </a:r>
-            <a:r>
-              <a:rPr sz="1400" b="0" dirty="0">
-                <a:solidFill>
-                  <a:srgbClr val="19242D"/>
-                </a:solidFill>
-                <a:latin typeface="Microsoft YaHei"/>
-              </a:rPr>
-              <a:t>/</a:t>
-            </a:r>
-            <a:r>
-              <a:rPr sz="1400" b="0" dirty="0" err="1">
-                <a:solidFill>
-                  <a:srgbClr val="19242D"/>
-                </a:solidFill>
-                <a:latin typeface="Microsoft YaHei"/>
-              </a:rPr>
-              <a:t>实体证据空间，减少无关条款干扰</a:t>
-            </a:r>
-            <a:r>
-              <a:rPr sz="1400" b="0" dirty="0">
-                <a:solidFill>
-                  <a:srgbClr val="19242D"/>
-                </a:solidFill>
-                <a:latin typeface="Microsoft YaHei"/>
-              </a:rPr>
-              <a:t>。</a:t>
+              <a:t>说明：局部路由把问题压到属性/实体证据空间，减少无关条款干扰。</a:t>
             </a:r>
           </a:p>
         </p:txBody>
@@ -2555,38 +2487,14 @@
           <a:p>
             <a:pPr algn="ctr"/>
             <a:r>
-              <a:rPr sz="1200" b="1" dirty="0" err="1">
+              <a:rPr sz="1000" b="1">
                 <a:solidFill>
                   <a:srgbClr val="004650"/>
                 </a:solidFill>
                 <a:latin typeface="Microsoft YaHei"/>
               </a:rPr>
-              <a:t>查跨条款关系</a:t>
-            </a:r>
-            <a:r>
-              <a:rPr sz="1200" b="1" dirty="0">
-                <a:solidFill>
-                  <a:srgbClr val="004650"/>
-                </a:solidFill>
-                <a:latin typeface="Microsoft YaHei"/>
-              </a:rPr>
-              <a:t> / </a:t>
-            </a:r>
-            <a:r>
-              <a:rPr sz="1200" b="1" dirty="0" err="1">
-                <a:solidFill>
-                  <a:srgbClr val="004650"/>
-                </a:solidFill>
-                <a:latin typeface="Microsoft YaHei"/>
-              </a:rPr>
-              <a:t>责任链</a:t>
-            </a:r>
-            <a:endParaRPr sz="1200" b="1" dirty="0">
-              <a:solidFill>
-                <a:srgbClr val="004650"/>
-              </a:solidFill>
-              <a:latin typeface="Microsoft YaHei"/>
-            </a:endParaRPr>
+              <a:t>查跨条款关系 / 责任链</a:t>
+            </a:r>
           </a:p>
         </p:txBody>
       </p:sp>
@@ -2599,7 +2507,7 @@
         <p:spPr>
           <a:xfrm>
             <a:off x="4407408" y="2359152"/>
-            <a:ext cx="3337560" cy="1118255"/>
+            <a:ext cx="3337560" cy="1783080"/>
           </a:xfrm>
           <a:prstGeom prst="rect">
             <a:avLst/>
@@ -2618,7 +2526,7 @@
               </a:spcAft>
             </a:pPr>
             <a:r>
-              <a:rPr sz="1200" b="1" dirty="0">
+              <a:rPr sz="900" b="1">
                 <a:solidFill>
                   <a:srgbClr val="C29748"/>
                 </a:solidFill>
@@ -2627,7 +2535,7 @@
               <a:t>• </a:t>
             </a:r>
             <a:r>
-              <a:rPr sz="1200" dirty="0">
+              <a:rPr sz="900">
                 <a:solidFill>
                   <a:srgbClr val="19242D"/>
                 </a:solidFill>
@@ -2643,7 +2551,7 @@
               </a:spcAft>
             </a:pPr>
             <a:r>
-              <a:rPr sz="1200" b="1" dirty="0">
+              <a:rPr sz="900" b="1">
                 <a:solidFill>
                   <a:srgbClr val="C29748"/>
                 </a:solidFill>
@@ -2652,31 +2560,13 @@
               <a:t>• </a:t>
             </a:r>
             <a:r>
-              <a:rPr sz="1200" dirty="0">
+              <a:rPr sz="900">
                 <a:solidFill>
                   <a:srgbClr val="19242D"/>
                 </a:solidFill>
                 <a:latin typeface="Microsoft YaHei"/>
               </a:rPr>
-              <a:t>vs </a:t>
-            </a:r>
-            <a:r>
-              <a:rPr sz="1200" dirty="0" err="1">
-                <a:solidFill>
-                  <a:srgbClr val="19242D"/>
-                </a:solidFill>
-                <a:latin typeface="Microsoft YaHei"/>
-              </a:rPr>
-              <a:t>LightRAG</a:t>
-            </a:r>
-            <a:r>
-              <a:rPr sz="1200" dirty="0">
-                <a:solidFill>
-                  <a:srgbClr val="19242D"/>
-                </a:solidFill>
-                <a:latin typeface="Microsoft YaHei"/>
-              </a:rPr>
-              <a:t> 0.4310 / GraphRAG 0.3745</a:t>
+              <a:t>vs LightRAG 0.4310 / GraphRAG 0.3745</a:t>
             </a:r>
           </a:p>
           <a:p>
@@ -2686,7 +2576,7 @@
               </a:spcAft>
             </a:pPr>
             <a:r>
-              <a:rPr sz="1200" b="1" dirty="0">
+              <a:rPr sz="900" b="1">
                 <a:solidFill>
                   <a:srgbClr val="C29748"/>
                 </a:solidFill>
@@ -2695,7 +2585,7 @@
               <a:t>• </a:t>
             </a:r>
             <a:r>
-              <a:rPr sz="1200" dirty="0">
+              <a:rPr sz="900">
                 <a:solidFill>
                   <a:srgbClr val="19242D"/>
                 </a:solidFill>
@@ -2711,7 +2601,7 @@
               </a:spcAft>
             </a:pPr>
             <a:r>
-              <a:rPr sz="1200" b="1" dirty="0">
+              <a:rPr sz="900" b="1">
                 <a:solidFill>
                   <a:srgbClr val="C29748"/>
                 </a:solidFill>
@@ -2720,7 +2610,7 @@
               <a:t>• </a:t>
             </a:r>
             <a:r>
-              <a:rPr sz="1200" dirty="0">
+              <a:rPr sz="900">
                 <a:solidFill>
                   <a:srgbClr val="19242D"/>
                 </a:solidFill>
@@ -2736,7 +2626,7 @@
               </a:spcAft>
             </a:pPr>
             <a:r>
-              <a:rPr sz="1200" b="1" dirty="0">
+              <a:rPr sz="900" b="1">
                 <a:solidFill>
                   <a:srgbClr val="C29748"/>
                 </a:solidFill>
@@ -2745,7 +2635,7 @@
               <a:t>• </a:t>
             </a:r>
             <a:r>
-              <a:rPr sz="1200" dirty="0">
+              <a:rPr sz="900">
                 <a:solidFill>
                   <a:srgbClr val="19242D"/>
                 </a:solidFill>
@@ -2799,22 +2689,13 @@
           <a:p>
             <a:pPr algn="ctr"/>
             <a:r>
-              <a:rPr sz="1400" b="0" dirty="0" err="1">
+              <a:rPr sz="1000" b="0">
                 <a:solidFill>
                   <a:srgbClr val="19242D"/>
                 </a:solidFill>
                 <a:latin typeface="Microsoft YaHei"/>
               </a:rPr>
-              <a:t>说明：路径约束提高证据纯度，但会牺牲部分宽泛召回</a:t>
-            </a:r>
-            <a:r>
-              <a:rPr sz="1400" b="0" dirty="0">
-                <a:solidFill>
-                  <a:srgbClr val="19242D"/>
-                </a:solidFill>
-                <a:latin typeface="Microsoft YaHei"/>
-              </a:rPr>
-              <a:t>。</a:t>
+              <a:t>说明：路径约束提高证据纯度，但会牺牲部分宽泛召回。</a:t>
             </a:r>
           </a:p>
         </p:txBody>
@@ -2914,38 +2795,14 @@
           <a:p>
             <a:pPr algn="ctr"/>
             <a:r>
-              <a:rPr sz="1200" b="1" dirty="0" err="1">
+              <a:rPr sz="1000" b="1">
                 <a:solidFill>
                   <a:srgbClr val="004650"/>
                 </a:solidFill>
                 <a:latin typeface="Microsoft YaHei"/>
               </a:rPr>
-              <a:t>查整体风险</a:t>
-            </a:r>
-            <a:r>
-              <a:rPr sz="1200" b="1" dirty="0">
-                <a:solidFill>
-                  <a:srgbClr val="004650"/>
-                </a:solidFill>
-                <a:latin typeface="Microsoft YaHei"/>
-              </a:rPr>
-              <a:t> / </a:t>
-            </a:r>
-            <a:r>
-              <a:rPr sz="1200" b="1" dirty="0" err="1">
-                <a:solidFill>
-                  <a:srgbClr val="004650"/>
-                </a:solidFill>
-                <a:latin typeface="Microsoft YaHei"/>
-              </a:rPr>
-              <a:t>主题画像</a:t>
-            </a:r>
-            <a:endParaRPr sz="1200" b="1" dirty="0">
-              <a:solidFill>
-                <a:srgbClr val="004650"/>
-              </a:solidFill>
-              <a:latin typeface="Microsoft YaHei"/>
-            </a:endParaRPr>
+              <a:t>查整体风险 / 主题画像</a:t>
+            </a:r>
           </a:p>
         </p:txBody>
       </p:sp>
@@ -2958,7 +2815,7 @@
         <p:spPr>
           <a:xfrm>
             <a:off x="8202168" y="2359152"/>
-            <a:ext cx="3337560" cy="1118255"/>
+            <a:ext cx="3337560" cy="1783080"/>
           </a:xfrm>
           <a:prstGeom prst="rect">
             <a:avLst/>
@@ -2977,7 +2834,7 @@
               </a:spcAft>
             </a:pPr>
             <a:r>
-              <a:rPr sz="1200" b="1" dirty="0">
+              <a:rPr sz="900" b="1">
                 <a:solidFill>
                   <a:srgbClr val="C29748"/>
                 </a:solidFill>
@@ -2986,7 +2843,7 @@
               <a:t>• </a:t>
             </a:r>
             <a:r>
-              <a:rPr sz="1200" dirty="0">
+              <a:rPr sz="900">
                 <a:solidFill>
                   <a:srgbClr val="19242D"/>
                 </a:solidFill>
@@ -3002,7 +2859,7 @@
               </a:spcAft>
             </a:pPr>
             <a:r>
-              <a:rPr sz="1200" b="1" dirty="0">
+              <a:rPr sz="900" b="1">
                 <a:solidFill>
                   <a:srgbClr val="C29748"/>
                 </a:solidFill>
@@ -3011,7 +2868,7 @@
               <a:t>• </a:t>
             </a:r>
             <a:r>
-              <a:rPr sz="1200" dirty="0">
+              <a:rPr sz="900">
                 <a:solidFill>
                   <a:srgbClr val="19242D"/>
                 </a:solidFill>
@@ -3027,7 +2884,7 @@
               </a:spcAft>
             </a:pPr>
             <a:r>
-              <a:rPr sz="1200" b="1" dirty="0">
+              <a:rPr sz="900" b="1">
                 <a:solidFill>
                   <a:srgbClr val="C29748"/>
                 </a:solidFill>
@@ -3036,7 +2893,7 @@
               <a:t>• </a:t>
             </a:r>
             <a:r>
-              <a:rPr sz="1200" dirty="0">
+              <a:rPr sz="900">
                 <a:solidFill>
                   <a:srgbClr val="19242D"/>
                 </a:solidFill>
@@ -3052,7 +2909,7 @@
               </a:spcAft>
             </a:pPr>
             <a:r>
-              <a:rPr sz="1200" b="1" dirty="0">
+              <a:rPr sz="900" b="1">
                 <a:solidFill>
                   <a:srgbClr val="C29748"/>
                 </a:solidFill>
@@ -3061,7 +2918,7 @@
               <a:t>• </a:t>
             </a:r>
             <a:r>
-              <a:rPr sz="1200" dirty="0">
+              <a:rPr sz="900">
                 <a:solidFill>
                   <a:srgbClr val="19242D"/>
                 </a:solidFill>
@@ -3077,7 +2934,7 @@
               </a:spcAft>
             </a:pPr>
             <a:r>
-              <a:rPr sz="1200" b="1" dirty="0">
+              <a:rPr sz="900" b="1">
                 <a:solidFill>
                   <a:srgbClr val="C29748"/>
                 </a:solidFill>
@@ -3086,7 +2943,7 @@
               <a:t>• </a:t>
             </a:r>
             <a:r>
-              <a:rPr sz="1200" dirty="0">
+              <a:rPr sz="900">
                 <a:solidFill>
                   <a:srgbClr val="19242D"/>
                 </a:solidFill>
@@ -3140,22 +2997,13 @@
           <a:p>
             <a:pPr algn="ctr"/>
             <a:r>
-              <a:rPr sz="1400" b="0" dirty="0" err="1">
+              <a:rPr sz="1000" b="0">
                 <a:solidFill>
                   <a:srgbClr val="19242D"/>
                 </a:solidFill>
                 <a:latin typeface="Microsoft YaHei"/>
               </a:rPr>
-              <a:t>说明：社区层先聚合主题，再下钻证据，提升全局判断的事实边界</a:t>
-            </a:r>
-            <a:r>
-              <a:rPr sz="1400" b="0" dirty="0">
-                <a:solidFill>
-                  <a:srgbClr val="19242D"/>
-                </a:solidFill>
-                <a:latin typeface="Microsoft YaHei"/>
-              </a:rPr>
-              <a:t>。</a:t>
+              <a:t>说明：社区层先聚合主题，再下钻证据，提升全局判断的事实边界。</a:t>
             </a:r>
           </a:p>
         </p:txBody>
@@ -3201,22 +3049,13 @@
           <a:p>
             <a:pPr algn="ctr"/>
             <a:r>
-              <a:rPr sz="1300" b="1" dirty="0" err="1">
+              <a:rPr sz="1300" b="1">
                 <a:solidFill>
                   <a:srgbClr val="FFFFFF"/>
                 </a:solidFill>
                 <a:latin typeface="Microsoft YaHei"/>
               </a:rPr>
-              <a:t>E-GraphRAG优势主要体现在企业场景更看重的证据精确度、语义一致性、事实边界和可追溯性上</a:t>
-            </a:r>
-            <a:r>
-              <a:rPr sz="1300" b="1" dirty="0">
-                <a:solidFill>
-                  <a:srgbClr val="FFFFFF"/>
-                </a:solidFill>
-                <a:latin typeface="Microsoft YaHei"/>
-              </a:rPr>
-              <a:t>。</a:t>
+              <a:t>更谨慎的结论：E-GraphRAG不是所有指标都绝对占优；它的优势主要体现在企业场景更看重的证据精确度、语义一致性、事实边界和可追溯性上。</a:t>
             </a:r>
           </a:p>
         </p:txBody>
@@ -4082,6 +3921,1119 @@
     <p:bg>
       <p:bgPr>
         <a:solidFill>
+          <a:srgbClr val="F8FAFA"/>
+        </a:solidFill>
+        <a:effectLst/>
+      </p:bgPr>
+    </p:bg>
+    <p:spTree>
+      <p:nvGrpSpPr>
+        <p:cNvPr id="1" name=""/>
+        <p:cNvGrpSpPr/>
+        <p:nvPr/>
+      </p:nvGrpSpPr>
+      <p:grpSpPr>
+        <a:xfrm>
+          <a:off x="0" y="0"/>
+          <a:ext cx="0" cy="0"/>
+          <a:chOff x="0" y="0"/>
+          <a:chExt cx="0" cy="0"/>
+        </a:xfrm>
+      </p:grpSpPr>
+      <p:pic>
+        <p:nvPicPr>
+          <p:cNvPr id="2" name="Picture 1" descr="image.png"/>
+          <p:cNvPicPr>
+            <a:picLocks noChangeAspect="1"/>
+          </p:cNvPicPr>
+          <p:nvPr/>
+        </p:nvPicPr>
+        <p:blipFill>
+          <a:blip r:embed="rId2"/>
+          <a:stretch>
+            <a:fillRect/>
+          </a:stretch>
+        </p:blipFill>
+        <p:spPr>
+          <a:xfrm>
+            <a:off x="384048" y="164592"/>
+            <a:ext cx="1444752" cy="463062"/>
+          </a:xfrm>
+          <a:prstGeom prst="rect">
+            <a:avLst/>
+          </a:prstGeom>
+        </p:spPr>
+      </p:pic>
+      <p:sp>
+        <p:nvSpPr>
+          <p:cNvPr id="3" name="TextBox 2"/>
+          <p:cNvSpPr txBox="1"/>
+          <p:nvPr/>
+        </p:nvSpPr>
+        <p:spPr>
+          <a:xfrm>
+            <a:off x="1965960" y="219456"/>
+            <a:ext cx="7680960" cy="384048"/>
+          </a:xfrm>
+          <a:prstGeom prst="rect">
+            <a:avLst/>
+          </a:prstGeom>
+          <a:noFill/>
+        </p:spPr>
+        <p:txBody>
+          <a:bodyPr wrap="square" anchor="t">
+            <a:spAutoFit/>
+          </a:bodyPr>
+          <a:lstStyle/>
+          <a:p>
+            <a:pPr algn="l"/>
+            <a:r>
+              <a:rPr sz="1700" b="1">
+                <a:solidFill>
+                  <a:srgbClr val="004650"/>
+                </a:solidFill>
+                <a:latin typeface="Microsoft YaHei"/>
+              </a:rPr>
+              <a:t>盲审专家意见回应</a:t>
+            </a:r>
+          </a:p>
+        </p:txBody>
+      </p:sp>
+      <p:sp>
+        <p:nvSpPr>
+          <p:cNvPr id="4" name="TextBox 3"/>
+          <p:cNvSpPr txBox="1"/>
+          <p:nvPr/>
+        </p:nvSpPr>
+        <p:spPr>
+          <a:xfrm>
+            <a:off x="10561320" y="219456"/>
+            <a:ext cx="914400" cy="292608"/>
+          </a:xfrm>
+          <a:prstGeom prst="rect">
+            <a:avLst/>
+          </a:prstGeom>
+          <a:noFill/>
+        </p:spPr>
+        <p:txBody>
+          <a:bodyPr wrap="square" anchor="t">
+            <a:spAutoFit/>
+          </a:bodyPr>
+          <a:lstStyle/>
+          <a:p>
+            <a:pPr algn="r"/>
+            <a:r>
+              <a:rPr sz="1000" b="0">
+                <a:solidFill>
+                  <a:srgbClr val="5C6B73"/>
+                </a:solidFill>
+                <a:latin typeface="Microsoft YaHei"/>
+              </a:rPr>
+              <a:t>12/12</a:t>
+            </a:r>
+          </a:p>
+        </p:txBody>
+      </p:sp>
+      <p:cxnSp>
+        <p:nvCxnSpPr>
+          <p:cNvPr id="5" name="Connector 4"/>
+          <p:cNvCxnSpPr/>
+          <p:nvPr/>
+        </p:nvCxnSpPr>
+        <p:spPr>
+          <a:xfrm>
+            <a:off x="384048" y="713232"/>
+            <a:ext cx="11457432" cy="0"/>
+          </a:xfrm>
+          <a:prstGeom prst="line">
+            <a:avLst/>
+          </a:prstGeom>
+          <a:ln w="12700">
+            <a:solidFill>
+              <a:srgbClr val="D9E2E1"/>
+            </a:solidFill>
+          </a:ln>
+        </p:spPr>
+        <p:style>
+          <a:lnRef idx="2">
+            <a:schemeClr val="accent1"/>
+          </a:lnRef>
+          <a:fillRef idx="0">
+            <a:schemeClr val="accent1"/>
+          </a:fillRef>
+          <a:effectRef idx="1">
+            <a:schemeClr val="accent1"/>
+          </a:effectRef>
+          <a:fontRef idx="minor">
+            <a:schemeClr val="tx1"/>
+          </a:fontRef>
+        </p:style>
+      </p:cxnSp>
+      <p:sp>
+        <p:nvSpPr>
+          <p:cNvPr id="6" name="TextBox 5"/>
+          <p:cNvSpPr txBox="1"/>
+          <p:nvPr/>
+        </p:nvSpPr>
+        <p:spPr>
+          <a:xfrm>
+            <a:off x="685800" y="960120"/>
+            <a:ext cx="9875520" cy="310896"/>
+          </a:xfrm>
+          <a:prstGeom prst="rect">
+            <a:avLst/>
+          </a:prstGeom>
+          <a:noFill/>
+        </p:spPr>
+        <p:txBody>
+          <a:bodyPr wrap="square" anchor="t">
+            <a:spAutoFit/>
+          </a:bodyPr>
+          <a:lstStyle/>
+          <a:p>
+            <a:pPr algn="l"/>
+            <a:r>
+              <a:rPr sz="1400" b="0">
+                <a:solidFill>
+                  <a:srgbClr val="5C6B73"/>
+                </a:solidFill>
+                <a:latin typeface="Microsoft YaHei"/>
+              </a:rPr>
+              <a:t>根据盲审意见，本次修改主要围绕理论规范、系统设计和实验数据三方面展开。</a:t>
+            </a:r>
+          </a:p>
+        </p:txBody>
+      </p:sp>
+      <p:sp>
+        <p:nvSpPr>
+          <p:cNvPr id="7" name="Rounded Rectangle 6"/>
+          <p:cNvSpPr/>
+          <p:nvPr/>
+        </p:nvSpPr>
+        <p:spPr>
+          <a:xfrm>
+            <a:off x="566928" y="1481328"/>
+            <a:ext cx="658368" cy="420624"/>
+          </a:xfrm>
+          <a:prstGeom prst="roundRect">
+            <a:avLst/>
+          </a:prstGeom>
+          <a:solidFill>
+            <a:srgbClr val="C29748"/>
+          </a:solidFill>
+          <a:ln>
+            <a:noFill/>
+          </a:ln>
+        </p:spPr>
+        <p:style>
+          <a:lnRef idx="1">
+            <a:schemeClr val="accent1"/>
+          </a:lnRef>
+          <a:fillRef idx="3">
+            <a:schemeClr val="accent1"/>
+          </a:fillRef>
+          <a:effectRef idx="2">
+            <a:schemeClr val="accent1"/>
+          </a:effectRef>
+          <a:fontRef idx="minor">
+            <a:schemeClr val="lt1"/>
+          </a:fontRef>
+        </p:style>
+        <p:txBody>
+          <a:bodyPr lIns="18288" tIns="12192" rIns="18288" bIns="12192" rtlCol="0" anchor="ctr"/>
+          <a:lstStyle/>
+          <a:p>
+            <a:pPr algn="ctr"/>
+            <a:r>
+              <a:rPr sz="1500" b="1">
+                <a:solidFill>
+                  <a:srgbClr val="FFFFFF"/>
+                </a:solidFill>
+                <a:latin typeface="Microsoft YaHei"/>
+              </a:rPr>
+              <a:t>01</a:t>
+            </a:r>
+          </a:p>
+        </p:txBody>
+      </p:sp>
+      <p:sp>
+        <p:nvSpPr>
+          <p:cNvPr id="8" name="Rounded Rectangle 7"/>
+          <p:cNvSpPr/>
+          <p:nvPr/>
+        </p:nvSpPr>
+        <p:spPr>
+          <a:xfrm>
+            <a:off x="1335024" y="1481328"/>
+            <a:ext cx="2514600" cy="420624"/>
+          </a:xfrm>
+          <a:prstGeom prst="roundRect">
+            <a:avLst/>
+          </a:prstGeom>
+          <a:solidFill>
+            <a:srgbClr val="004650"/>
+          </a:solidFill>
+          <a:ln>
+            <a:noFill/>
+          </a:ln>
+        </p:spPr>
+        <p:style>
+          <a:lnRef idx="1">
+            <a:schemeClr val="accent1"/>
+          </a:lnRef>
+          <a:fillRef idx="3">
+            <a:schemeClr val="accent1"/>
+          </a:fillRef>
+          <a:effectRef idx="2">
+            <a:schemeClr val="accent1"/>
+          </a:effectRef>
+          <a:fontRef idx="minor">
+            <a:schemeClr val="lt1"/>
+          </a:fontRef>
+        </p:style>
+        <p:txBody>
+          <a:bodyPr lIns="18288" tIns="12192" rIns="18288" bIns="12192" rtlCol="0" anchor="ctr"/>
+          <a:lstStyle/>
+          <a:p>
+            <a:pPr algn="ctr"/>
+            <a:r>
+              <a:rPr sz="1500" b="1">
+                <a:solidFill>
+                  <a:srgbClr val="FFFFFF"/>
+                </a:solidFill>
+                <a:latin typeface="Microsoft YaHei"/>
+              </a:rPr>
+              <a:t>理论与规范</a:t>
+            </a:r>
+          </a:p>
+        </p:txBody>
+      </p:sp>
+      <p:sp>
+        <p:nvSpPr>
+          <p:cNvPr id="9" name="Rounded Rectangle 8"/>
+          <p:cNvSpPr/>
+          <p:nvPr/>
+        </p:nvSpPr>
+        <p:spPr>
+          <a:xfrm>
+            <a:off x="566928" y="2048256"/>
+            <a:ext cx="3291840" cy="2148840"/>
+          </a:xfrm>
+          <a:prstGeom prst="roundRect">
+            <a:avLst/>
+          </a:prstGeom>
+          <a:solidFill>
+            <a:srgbClr val="FFFFFF"/>
+          </a:solidFill>
+          <a:ln w="12700">
+            <a:solidFill>
+              <a:srgbClr val="D9E2E1"/>
+            </a:solidFill>
+          </a:ln>
+        </p:spPr>
+        <p:style>
+          <a:lnRef idx="1">
+            <a:schemeClr val="accent1"/>
+          </a:lnRef>
+          <a:fillRef idx="3">
+            <a:schemeClr val="accent1"/>
+          </a:fillRef>
+          <a:effectRef idx="2">
+            <a:schemeClr val="accent1"/>
+          </a:effectRef>
+          <a:fontRef idx="minor">
+            <a:schemeClr val="lt1"/>
+          </a:fontRef>
+        </p:style>
+        <p:txBody>
+          <a:bodyPr lIns="109728" tIns="73152" rIns="109728" bIns="73152" rtlCol="0" anchor="t"/>
+          <a:lstStyle/>
+          <a:p>
+            <a:pPr algn="l"/>
+            <a:endParaRPr/>
+          </a:p>
+        </p:txBody>
+      </p:sp>
+      <p:sp>
+        <p:nvSpPr>
+          <p:cNvPr id="10" name="TextBox 9"/>
+          <p:cNvSpPr txBox="1"/>
+          <p:nvPr/>
+        </p:nvSpPr>
+        <p:spPr>
+          <a:xfrm>
+            <a:off x="731520" y="2212848"/>
+            <a:ext cx="2971800" cy="1513235"/>
+          </a:xfrm>
+          <a:prstGeom prst="rect">
+            <a:avLst/>
+          </a:prstGeom>
+          <a:noFill/>
+        </p:spPr>
+        <p:txBody>
+          <a:bodyPr wrap="square">
+            <a:spAutoFit/>
+          </a:bodyPr>
+          <a:lstStyle/>
+          <a:p>
+            <a:pPr algn="l">
+              <a:spcAft>
+                <a:spcPts val="500"/>
+              </a:spcAft>
+            </a:pPr>
+            <a:r>
+              <a:rPr sz="1400" b="1" dirty="0">
+                <a:solidFill>
+                  <a:srgbClr val="C29748"/>
+                </a:solidFill>
+                <a:latin typeface="Microsoft YaHei"/>
+              </a:rPr>
+              <a:t>• </a:t>
+            </a:r>
+            <a:r>
+              <a:rPr sz="1400" dirty="0" err="1">
+                <a:solidFill>
+                  <a:srgbClr val="19242D"/>
+                </a:solidFill>
+                <a:latin typeface="Microsoft YaHei"/>
+              </a:rPr>
+              <a:t>增设企业知识库与检索知识库的核心概念界定</a:t>
+            </a:r>
+            <a:endParaRPr sz="1400" dirty="0">
+              <a:solidFill>
+                <a:srgbClr val="19242D"/>
+              </a:solidFill>
+              <a:latin typeface="Microsoft YaHei"/>
+            </a:endParaRPr>
+          </a:p>
+          <a:p>
+            <a:pPr algn="l">
+              <a:spcAft>
+                <a:spcPts val="500"/>
+              </a:spcAft>
+            </a:pPr>
+            <a:r>
+              <a:rPr sz="1400" b="1" dirty="0">
+                <a:solidFill>
+                  <a:srgbClr val="C29748"/>
+                </a:solidFill>
+                <a:latin typeface="Microsoft YaHei"/>
+              </a:rPr>
+              <a:t>• </a:t>
+            </a:r>
+            <a:r>
+              <a:rPr sz="1400" dirty="0" err="1">
+                <a:solidFill>
+                  <a:srgbClr val="19242D"/>
+                </a:solidFill>
+                <a:latin typeface="Microsoft YaHei"/>
+              </a:rPr>
+              <a:t>补充近两年国外前沿文献，完善研究基础</a:t>
+            </a:r>
+            <a:endParaRPr sz="1400" dirty="0">
+              <a:solidFill>
+                <a:srgbClr val="19242D"/>
+              </a:solidFill>
+              <a:latin typeface="Microsoft YaHei"/>
+            </a:endParaRPr>
+          </a:p>
+          <a:p>
+            <a:pPr algn="l">
+              <a:spcAft>
+                <a:spcPts val="500"/>
+              </a:spcAft>
+            </a:pPr>
+            <a:r>
+              <a:rPr sz="1400" b="1" dirty="0">
+                <a:solidFill>
+                  <a:srgbClr val="C29748"/>
+                </a:solidFill>
+                <a:latin typeface="Microsoft YaHei"/>
+              </a:rPr>
+              <a:t>• </a:t>
+            </a:r>
+            <a:r>
+              <a:rPr sz="1400" dirty="0" err="1">
+                <a:solidFill>
+                  <a:srgbClr val="19242D"/>
+                </a:solidFill>
+                <a:latin typeface="Microsoft YaHei"/>
+              </a:rPr>
+              <a:t>规范提炼四项学术研究方法，优化技术路线图与引用格式</a:t>
+            </a:r>
+            <a:endParaRPr sz="1400" dirty="0">
+              <a:solidFill>
+                <a:srgbClr val="19242D"/>
+              </a:solidFill>
+              <a:latin typeface="Microsoft YaHei"/>
+            </a:endParaRPr>
+          </a:p>
+        </p:txBody>
+      </p:sp>
+      <p:sp>
+        <p:nvSpPr>
+          <p:cNvPr id="11" name="Rounded Rectangle 10"/>
+          <p:cNvSpPr/>
+          <p:nvPr/>
+        </p:nvSpPr>
+        <p:spPr>
+          <a:xfrm>
+            <a:off x="4315968" y="1481328"/>
+            <a:ext cx="658368" cy="420624"/>
+          </a:xfrm>
+          <a:prstGeom prst="roundRect">
+            <a:avLst/>
+          </a:prstGeom>
+          <a:solidFill>
+            <a:srgbClr val="C29748"/>
+          </a:solidFill>
+          <a:ln>
+            <a:noFill/>
+          </a:ln>
+        </p:spPr>
+        <p:style>
+          <a:lnRef idx="1">
+            <a:schemeClr val="accent1"/>
+          </a:lnRef>
+          <a:fillRef idx="3">
+            <a:schemeClr val="accent1"/>
+          </a:fillRef>
+          <a:effectRef idx="2">
+            <a:schemeClr val="accent1"/>
+          </a:effectRef>
+          <a:fontRef idx="minor">
+            <a:schemeClr val="lt1"/>
+          </a:fontRef>
+        </p:style>
+        <p:txBody>
+          <a:bodyPr lIns="18288" tIns="12192" rIns="18288" bIns="12192" rtlCol="0" anchor="ctr"/>
+          <a:lstStyle/>
+          <a:p>
+            <a:pPr algn="ctr"/>
+            <a:r>
+              <a:rPr sz="1500" b="1">
+                <a:solidFill>
+                  <a:srgbClr val="FFFFFF"/>
+                </a:solidFill>
+                <a:latin typeface="Microsoft YaHei"/>
+              </a:rPr>
+              <a:t>02</a:t>
+            </a:r>
+          </a:p>
+        </p:txBody>
+      </p:sp>
+      <p:sp>
+        <p:nvSpPr>
+          <p:cNvPr id="12" name="Rounded Rectangle 11"/>
+          <p:cNvSpPr/>
+          <p:nvPr/>
+        </p:nvSpPr>
+        <p:spPr>
+          <a:xfrm>
+            <a:off x="5084064" y="1481328"/>
+            <a:ext cx="2514600" cy="420624"/>
+          </a:xfrm>
+          <a:prstGeom prst="roundRect">
+            <a:avLst/>
+          </a:prstGeom>
+          <a:solidFill>
+            <a:srgbClr val="004650"/>
+          </a:solidFill>
+          <a:ln>
+            <a:noFill/>
+          </a:ln>
+        </p:spPr>
+        <p:style>
+          <a:lnRef idx="1">
+            <a:schemeClr val="accent1"/>
+          </a:lnRef>
+          <a:fillRef idx="3">
+            <a:schemeClr val="accent1"/>
+          </a:fillRef>
+          <a:effectRef idx="2">
+            <a:schemeClr val="accent1"/>
+          </a:effectRef>
+          <a:fontRef idx="minor">
+            <a:schemeClr val="lt1"/>
+          </a:fontRef>
+        </p:style>
+        <p:txBody>
+          <a:bodyPr lIns="18288" tIns="12192" rIns="18288" bIns="12192" rtlCol="0" anchor="ctr"/>
+          <a:lstStyle/>
+          <a:p>
+            <a:pPr algn="ctr"/>
+            <a:r>
+              <a:rPr sz="1500" b="1">
+                <a:solidFill>
+                  <a:srgbClr val="FFFFFF"/>
+                </a:solidFill>
+                <a:latin typeface="Microsoft YaHei"/>
+              </a:rPr>
+              <a:t>系统设计与约束</a:t>
+            </a:r>
+          </a:p>
+        </p:txBody>
+      </p:sp>
+      <p:sp>
+        <p:nvSpPr>
+          <p:cNvPr id="13" name="Rounded Rectangle 12"/>
+          <p:cNvSpPr/>
+          <p:nvPr/>
+        </p:nvSpPr>
+        <p:spPr>
+          <a:xfrm>
+            <a:off x="4315968" y="2048256"/>
+            <a:ext cx="3291840" cy="2148840"/>
+          </a:xfrm>
+          <a:prstGeom prst="roundRect">
+            <a:avLst/>
+          </a:prstGeom>
+          <a:solidFill>
+            <a:srgbClr val="FFFFFF"/>
+          </a:solidFill>
+          <a:ln w="12700">
+            <a:solidFill>
+              <a:srgbClr val="D9E2E1"/>
+            </a:solidFill>
+          </a:ln>
+        </p:spPr>
+        <p:style>
+          <a:lnRef idx="1">
+            <a:schemeClr val="accent1"/>
+          </a:lnRef>
+          <a:fillRef idx="3">
+            <a:schemeClr val="accent1"/>
+          </a:fillRef>
+          <a:effectRef idx="2">
+            <a:schemeClr val="accent1"/>
+          </a:effectRef>
+          <a:fontRef idx="minor">
+            <a:schemeClr val="lt1"/>
+          </a:fontRef>
+        </p:style>
+        <p:txBody>
+          <a:bodyPr lIns="109728" tIns="73152" rIns="109728" bIns="73152" rtlCol="0" anchor="t"/>
+          <a:lstStyle/>
+          <a:p>
+            <a:pPr algn="l"/>
+            <a:endParaRPr/>
+          </a:p>
+        </p:txBody>
+      </p:sp>
+      <p:sp>
+        <p:nvSpPr>
+          <p:cNvPr id="14" name="TextBox 13"/>
+          <p:cNvSpPr txBox="1"/>
+          <p:nvPr/>
+        </p:nvSpPr>
+        <p:spPr>
+          <a:xfrm>
+            <a:off x="4480559" y="2212848"/>
+            <a:ext cx="2971800" cy="1297791"/>
+          </a:xfrm>
+          <a:prstGeom prst="rect">
+            <a:avLst/>
+          </a:prstGeom>
+          <a:noFill/>
+        </p:spPr>
+        <p:txBody>
+          <a:bodyPr wrap="square">
+            <a:spAutoFit/>
+          </a:bodyPr>
+          <a:lstStyle/>
+          <a:p>
+            <a:pPr algn="l">
+              <a:spcAft>
+                <a:spcPts val="500"/>
+              </a:spcAft>
+            </a:pPr>
+            <a:r>
+              <a:rPr sz="1400" b="1" dirty="0">
+                <a:solidFill>
+                  <a:srgbClr val="C29748"/>
+                </a:solidFill>
+                <a:latin typeface="Microsoft YaHei"/>
+              </a:rPr>
+              <a:t>• </a:t>
+            </a:r>
+            <a:r>
+              <a:rPr sz="1400" dirty="0" err="1">
+                <a:solidFill>
+                  <a:srgbClr val="19242D"/>
+                </a:solidFill>
+                <a:latin typeface="Microsoft YaHei"/>
+              </a:rPr>
+              <a:t>进一步说明关键参数的业务选取原则</a:t>
+            </a:r>
+            <a:endParaRPr sz="1400" dirty="0">
+              <a:solidFill>
+                <a:srgbClr val="19242D"/>
+              </a:solidFill>
+              <a:latin typeface="Microsoft YaHei"/>
+            </a:endParaRPr>
+          </a:p>
+          <a:p>
+            <a:pPr algn="l">
+              <a:spcAft>
+                <a:spcPts val="500"/>
+              </a:spcAft>
+            </a:pPr>
+            <a:r>
+              <a:rPr sz="1400" b="1" dirty="0">
+                <a:solidFill>
+                  <a:srgbClr val="C29748"/>
+                </a:solidFill>
+                <a:latin typeface="Microsoft YaHei"/>
+              </a:rPr>
+              <a:t>• </a:t>
+            </a:r>
+            <a:r>
+              <a:rPr sz="1400" dirty="0" err="1">
+                <a:solidFill>
+                  <a:srgbClr val="19242D"/>
+                </a:solidFill>
+                <a:latin typeface="Microsoft YaHei"/>
+              </a:rPr>
+              <a:t>补充创新变量的理论依据</a:t>
+            </a:r>
+            <a:endParaRPr sz="1400" dirty="0">
+              <a:solidFill>
+                <a:srgbClr val="19242D"/>
+              </a:solidFill>
+              <a:latin typeface="Microsoft YaHei"/>
+            </a:endParaRPr>
+          </a:p>
+          <a:p>
+            <a:pPr algn="l">
+              <a:spcAft>
+                <a:spcPts val="500"/>
+              </a:spcAft>
+            </a:pPr>
+            <a:r>
+              <a:rPr sz="1400" b="1" dirty="0">
+                <a:solidFill>
+                  <a:srgbClr val="C29748"/>
+                </a:solidFill>
+                <a:latin typeface="Microsoft YaHei"/>
+              </a:rPr>
+              <a:t>• </a:t>
+            </a:r>
+            <a:r>
+              <a:rPr sz="1400" dirty="0" err="1">
+                <a:solidFill>
+                  <a:srgbClr val="19242D"/>
+                </a:solidFill>
+                <a:latin typeface="Microsoft YaHei"/>
+              </a:rPr>
+              <a:t>强化需求建模、框架设计与实证验证之间的对应关系</a:t>
+            </a:r>
+            <a:endParaRPr sz="1400" dirty="0">
+              <a:solidFill>
+                <a:srgbClr val="19242D"/>
+              </a:solidFill>
+              <a:latin typeface="Microsoft YaHei"/>
+            </a:endParaRPr>
+          </a:p>
+        </p:txBody>
+      </p:sp>
+      <p:sp>
+        <p:nvSpPr>
+          <p:cNvPr id="15" name="Rounded Rectangle 14"/>
+          <p:cNvSpPr/>
+          <p:nvPr/>
+        </p:nvSpPr>
+        <p:spPr>
+          <a:xfrm>
+            <a:off x="8065008" y="1481328"/>
+            <a:ext cx="658368" cy="420624"/>
+          </a:xfrm>
+          <a:prstGeom prst="roundRect">
+            <a:avLst/>
+          </a:prstGeom>
+          <a:solidFill>
+            <a:srgbClr val="C29748"/>
+          </a:solidFill>
+          <a:ln>
+            <a:noFill/>
+          </a:ln>
+        </p:spPr>
+        <p:style>
+          <a:lnRef idx="1">
+            <a:schemeClr val="accent1"/>
+          </a:lnRef>
+          <a:fillRef idx="3">
+            <a:schemeClr val="accent1"/>
+          </a:fillRef>
+          <a:effectRef idx="2">
+            <a:schemeClr val="accent1"/>
+          </a:effectRef>
+          <a:fontRef idx="minor">
+            <a:schemeClr val="lt1"/>
+          </a:fontRef>
+        </p:style>
+        <p:txBody>
+          <a:bodyPr lIns="18288" tIns="12192" rIns="18288" bIns="12192" rtlCol="0" anchor="ctr"/>
+          <a:lstStyle/>
+          <a:p>
+            <a:pPr algn="ctr"/>
+            <a:r>
+              <a:rPr sz="1500" b="1">
+                <a:solidFill>
+                  <a:srgbClr val="FFFFFF"/>
+                </a:solidFill>
+                <a:latin typeface="Microsoft YaHei"/>
+              </a:rPr>
+              <a:t>03</a:t>
+            </a:r>
+          </a:p>
+        </p:txBody>
+      </p:sp>
+      <p:sp>
+        <p:nvSpPr>
+          <p:cNvPr id="16" name="Rounded Rectangle 15"/>
+          <p:cNvSpPr/>
+          <p:nvPr/>
+        </p:nvSpPr>
+        <p:spPr>
+          <a:xfrm>
+            <a:off x="8833104" y="1481328"/>
+            <a:ext cx="2514600" cy="420624"/>
+          </a:xfrm>
+          <a:prstGeom prst="roundRect">
+            <a:avLst/>
+          </a:prstGeom>
+          <a:solidFill>
+            <a:srgbClr val="004650"/>
+          </a:solidFill>
+          <a:ln>
+            <a:noFill/>
+          </a:ln>
+        </p:spPr>
+        <p:style>
+          <a:lnRef idx="1">
+            <a:schemeClr val="accent1"/>
+          </a:lnRef>
+          <a:fillRef idx="3">
+            <a:schemeClr val="accent1"/>
+          </a:fillRef>
+          <a:effectRef idx="2">
+            <a:schemeClr val="accent1"/>
+          </a:effectRef>
+          <a:fontRef idx="minor">
+            <a:schemeClr val="lt1"/>
+          </a:fontRef>
+        </p:style>
+        <p:txBody>
+          <a:bodyPr lIns="18288" tIns="12192" rIns="18288" bIns="12192" rtlCol="0" anchor="ctr"/>
+          <a:lstStyle/>
+          <a:p>
+            <a:pPr algn="ctr"/>
+            <a:r>
+              <a:rPr sz="1500" b="1">
+                <a:solidFill>
+                  <a:srgbClr val="FFFFFF"/>
+                </a:solidFill>
+                <a:latin typeface="Microsoft YaHei"/>
+              </a:rPr>
+              <a:t>实验与数据</a:t>
+            </a:r>
+          </a:p>
+        </p:txBody>
+      </p:sp>
+      <p:sp>
+        <p:nvSpPr>
+          <p:cNvPr id="17" name="Rounded Rectangle 16"/>
+          <p:cNvSpPr/>
+          <p:nvPr/>
+        </p:nvSpPr>
+        <p:spPr>
+          <a:xfrm>
+            <a:off x="8065008" y="2048256"/>
+            <a:ext cx="3291840" cy="2148840"/>
+          </a:xfrm>
+          <a:prstGeom prst="roundRect">
+            <a:avLst/>
+          </a:prstGeom>
+          <a:solidFill>
+            <a:srgbClr val="FFFFFF"/>
+          </a:solidFill>
+          <a:ln w="12700">
+            <a:solidFill>
+              <a:srgbClr val="D9E2E1"/>
+            </a:solidFill>
+          </a:ln>
+        </p:spPr>
+        <p:style>
+          <a:lnRef idx="1">
+            <a:schemeClr val="accent1"/>
+          </a:lnRef>
+          <a:fillRef idx="3">
+            <a:schemeClr val="accent1"/>
+          </a:fillRef>
+          <a:effectRef idx="2">
+            <a:schemeClr val="accent1"/>
+          </a:effectRef>
+          <a:fontRef idx="minor">
+            <a:schemeClr val="lt1"/>
+          </a:fontRef>
+        </p:style>
+        <p:txBody>
+          <a:bodyPr lIns="109728" tIns="73152" rIns="109728" bIns="73152" rtlCol="0" anchor="t"/>
+          <a:lstStyle/>
+          <a:p>
+            <a:pPr algn="l"/>
+            <a:endParaRPr/>
+          </a:p>
+        </p:txBody>
+      </p:sp>
+      <p:sp>
+        <p:nvSpPr>
+          <p:cNvPr id="18" name="TextBox 17"/>
+          <p:cNvSpPr txBox="1"/>
+          <p:nvPr/>
+        </p:nvSpPr>
+        <p:spPr>
+          <a:xfrm>
+            <a:off x="8229600" y="2212848"/>
+            <a:ext cx="2971800" cy="1297791"/>
+          </a:xfrm>
+          <a:prstGeom prst="rect">
+            <a:avLst/>
+          </a:prstGeom>
+          <a:noFill/>
+        </p:spPr>
+        <p:txBody>
+          <a:bodyPr wrap="square">
+            <a:spAutoFit/>
+          </a:bodyPr>
+          <a:lstStyle/>
+          <a:p>
+            <a:pPr algn="l">
+              <a:spcAft>
+                <a:spcPts val="500"/>
+              </a:spcAft>
+            </a:pPr>
+            <a:r>
+              <a:rPr sz="1400" b="1" dirty="0">
+                <a:solidFill>
+                  <a:srgbClr val="C29748"/>
+                </a:solidFill>
+                <a:latin typeface="Microsoft YaHei"/>
+              </a:rPr>
+              <a:t>• </a:t>
+            </a:r>
+            <a:r>
+              <a:rPr sz="1400" dirty="0" err="1">
+                <a:solidFill>
+                  <a:srgbClr val="19242D"/>
+                </a:solidFill>
+                <a:latin typeface="Microsoft YaHei"/>
+              </a:rPr>
+              <a:t>新增</a:t>
+            </a:r>
+            <a:r>
+              <a:rPr sz="1400" dirty="0">
+                <a:solidFill>
+                  <a:srgbClr val="19242D"/>
+                </a:solidFill>
+                <a:latin typeface="Microsoft YaHei"/>
+              </a:rPr>
+              <a:t> VectorRAG </a:t>
+            </a:r>
+            <a:r>
+              <a:rPr sz="1400" dirty="0" err="1">
+                <a:solidFill>
+                  <a:srgbClr val="19242D"/>
+                </a:solidFill>
+                <a:latin typeface="Microsoft YaHei"/>
+              </a:rPr>
+              <a:t>作为基础对照组</a:t>
+            </a:r>
+            <a:endParaRPr sz="1400" dirty="0">
+              <a:solidFill>
+                <a:srgbClr val="19242D"/>
+              </a:solidFill>
+              <a:latin typeface="Microsoft YaHei"/>
+            </a:endParaRPr>
+          </a:p>
+          <a:p>
+            <a:pPr algn="l">
+              <a:spcAft>
+                <a:spcPts val="500"/>
+              </a:spcAft>
+            </a:pPr>
+            <a:r>
+              <a:rPr sz="1400" b="1" dirty="0">
+                <a:solidFill>
+                  <a:srgbClr val="C29748"/>
+                </a:solidFill>
+                <a:latin typeface="Microsoft YaHei"/>
+              </a:rPr>
+              <a:t>• </a:t>
+            </a:r>
+            <a:r>
+              <a:rPr lang="zh-CN" altLang="en-US" sz="1400" dirty="0">
+                <a:solidFill>
+                  <a:srgbClr val="19242D"/>
+                </a:solidFill>
+                <a:latin typeface="Microsoft YaHei" panose="020B0503020204020204" pitchFamily="34" charset="-122"/>
+                <a:ea typeface="Microsoft YaHei" panose="020B0503020204020204" pitchFamily="34" charset="-122"/>
+              </a:rPr>
+              <a:t>明确</a:t>
+            </a:r>
+            <a:r>
+              <a:rPr sz="1400" dirty="0" err="1">
+                <a:solidFill>
+                  <a:srgbClr val="19242D"/>
+                </a:solidFill>
+                <a:latin typeface="Microsoft YaHei"/>
+              </a:rPr>
+              <a:t>文本切片、模型调用等微观实验参数</a:t>
+            </a:r>
+            <a:endParaRPr sz="1400" dirty="0">
+              <a:solidFill>
+                <a:srgbClr val="19242D"/>
+              </a:solidFill>
+              <a:latin typeface="Microsoft YaHei"/>
+            </a:endParaRPr>
+          </a:p>
+          <a:p>
+            <a:pPr algn="l">
+              <a:spcAft>
+                <a:spcPts val="500"/>
+              </a:spcAft>
+            </a:pPr>
+            <a:r>
+              <a:rPr sz="1400" b="1" dirty="0">
+                <a:solidFill>
+                  <a:srgbClr val="C29748"/>
+                </a:solidFill>
+                <a:latin typeface="Microsoft YaHei"/>
+              </a:rPr>
+              <a:t>• </a:t>
+            </a:r>
+            <a:r>
+              <a:rPr sz="1400" dirty="0">
+                <a:solidFill>
+                  <a:srgbClr val="19242D"/>
+                </a:solidFill>
+                <a:latin typeface="Microsoft YaHei"/>
+              </a:rPr>
+              <a:t>结果显示：仅损失约5%冗余召回，检索精准度提升22%以上</a:t>
+            </a:r>
+          </a:p>
+        </p:txBody>
+      </p:sp>
+      <p:sp>
+        <p:nvSpPr>
+          <p:cNvPr id="19" name="Rounded Rectangle 18"/>
+          <p:cNvSpPr/>
+          <p:nvPr/>
+        </p:nvSpPr>
+        <p:spPr>
+          <a:xfrm>
+            <a:off x="841248" y="5047488"/>
+            <a:ext cx="10469880" cy="658368"/>
+          </a:xfrm>
+          <a:prstGeom prst="roundRect">
+            <a:avLst/>
+          </a:prstGeom>
+          <a:solidFill>
+            <a:srgbClr val="006369"/>
+          </a:solidFill>
+          <a:ln>
+            <a:noFill/>
+          </a:ln>
+        </p:spPr>
+        <p:style>
+          <a:lnRef idx="1">
+            <a:schemeClr val="accent1"/>
+          </a:lnRef>
+          <a:fillRef idx="3">
+            <a:schemeClr val="accent1"/>
+          </a:fillRef>
+          <a:effectRef idx="2">
+            <a:schemeClr val="accent1"/>
+          </a:effectRef>
+          <a:fontRef idx="minor">
+            <a:schemeClr val="lt1"/>
+          </a:fontRef>
+        </p:style>
+        <p:txBody>
+          <a:bodyPr lIns="109728" tIns="73152" rIns="109728" bIns="73152" rtlCol="0" anchor="ctr"/>
+          <a:lstStyle/>
+          <a:p>
+            <a:pPr algn="ctr"/>
+            <a:r>
+              <a:rPr sz="1400" b="1" dirty="0" err="1">
+                <a:solidFill>
+                  <a:srgbClr val="FFFFFF"/>
+                </a:solidFill>
+                <a:latin typeface="Microsoft YaHei"/>
+              </a:rPr>
+              <a:t>修改主线：先补足概念与文献基础，再明确方法设计约束，最后通过新增基线和参数固化回应实验有效性问题</a:t>
+            </a:r>
+            <a:r>
+              <a:rPr sz="1400" b="1" dirty="0">
+                <a:solidFill>
+                  <a:srgbClr val="FFFFFF"/>
+                </a:solidFill>
+                <a:latin typeface="Microsoft YaHei"/>
+              </a:rPr>
+              <a:t>。</a:t>
+            </a:r>
+          </a:p>
+        </p:txBody>
+      </p:sp>
+      <p:sp>
+        <p:nvSpPr>
+          <p:cNvPr id="20" name="TextBox 19"/>
+          <p:cNvSpPr txBox="1"/>
+          <p:nvPr/>
+        </p:nvSpPr>
+        <p:spPr>
+          <a:xfrm>
+            <a:off x="502920" y="6510528"/>
+            <a:ext cx="5029200" cy="201168"/>
+          </a:xfrm>
+          <a:prstGeom prst="rect">
+            <a:avLst/>
+          </a:prstGeom>
+          <a:noFill/>
+        </p:spPr>
+        <p:txBody>
+          <a:bodyPr wrap="square" anchor="t">
+            <a:spAutoFit/>
+          </a:bodyPr>
+          <a:lstStyle/>
+          <a:p>
+            <a:pPr algn="l"/>
+            <a:r>
+              <a:rPr sz="800" b="0">
+                <a:solidFill>
+                  <a:srgbClr val="5C6B73"/>
+                </a:solidFill>
+                <a:latin typeface="Microsoft YaHei"/>
+              </a:rPr>
+              <a:t>基于GraphRAG的企业知识库检索优化研究</a:t>
+            </a:r>
+          </a:p>
+        </p:txBody>
+      </p:sp>
+    </p:spTree>
+  </p:cSld>
+  <p:clrMapOvr>
+    <a:masterClrMapping/>
+  </p:clrMapOvr>
+</p:sld>
+</file>
+
+<file path=ppt/slides/slide13.xml><?xml version="1.0" encoding="utf-8"?>
+<p:sld xmlns:a="http://schemas.openxmlformats.org/drawingml/2006/main" xmlns:r="http://schemas.openxmlformats.org/officeDocument/2006/relationships" xmlns:p="http://schemas.openxmlformats.org/presentationml/2006/main">
+  <p:cSld>
+    <p:bg>
+      <p:bgPr>
+        <a:solidFill>
           <a:srgbClr val="004650"/>
         </a:solidFill>
         <a:effectLst/>
@@ -4103,75 +5055,7 @@
       </p:grpSpPr>
       <p:sp>
         <p:nvSpPr>
-          <p:cNvPr id="2" name="Rounded Rectangle 1"/>
-          <p:cNvSpPr/>
-          <p:nvPr/>
-        </p:nvSpPr>
-        <p:spPr>
-          <a:xfrm>
-            <a:off x="566928" y="384048"/>
-            <a:ext cx="2240280" cy="731520"/>
-          </a:xfrm>
-          <a:prstGeom prst="roundRect">
-            <a:avLst/>
-          </a:prstGeom>
-          <a:solidFill>
-            <a:srgbClr val="FFFFFF"/>
-          </a:solidFill>
-          <a:ln>
-            <a:noFill/>
-          </a:ln>
-        </p:spPr>
-        <p:style>
-          <a:lnRef idx="1">
-            <a:schemeClr val="accent1"/>
-          </a:lnRef>
-          <a:fillRef idx="3">
-            <a:schemeClr val="accent1"/>
-          </a:fillRef>
-          <a:effectRef idx="2">
-            <a:schemeClr val="accent1"/>
-          </a:effectRef>
-          <a:fontRef idx="minor">
-            <a:schemeClr val="lt1"/>
-          </a:fontRef>
-        </p:style>
-        <p:txBody>
-          <a:bodyPr lIns="109728" tIns="73152" rIns="109728" bIns="73152" rtlCol="0" anchor="t"/>
-          <a:lstStyle/>
-          <a:p>
-            <a:pPr algn="l"/>
-            <a:endParaRPr/>
-          </a:p>
-        </p:txBody>
-      </p:sp>
-      <p:pic>
-        <p:nvPicPr>
-          <p:cNvPr id="3" name="Picture 2" descr="image.png"/>
-          <p:cNvPicPr>
-            <a:picLocks noChangeAspect="1"/>
-          </p:cNvPicPr>
-          <p:nvPr/>
-        </p:nvPicPr>
-        <p:blipFill>
-          <a:blip r:embed="rId2"/>
-          <a:stretch>
-            <a:fillRect/>
-          </a:stretch>
-        </p:blipFill>
-        <p:spPr>
-          <a:xfrm>
-            <a:off x="694944" y="475488"/>
-            <a:ext cx="1920240" cy="615462"/>
-          </a:xfrm>
-          <a:prstGeom prst="rect">
-            <a:avLst/>
-          </a:prstGeom>
-        </p:spPr>
-      </p:pic>
-      <p:sp>
-        <p:nvSpPr>
-          <p:cNvPr id="4" name="TextBox 3"/>
+          <p:cNvPr id="2" name="TextBox 1"/>
           <p:cNvSpPr txBox="1"/>
           <p:nvPr/>
         </p:nvSpPr>
@@ -4193,7 +5077,7 @@
           <a:p>
             <a:pPr algn="ctr"/>
             <a:r>
-              <a:rPr sz="3200" b="1">
+              <a:rPr sz="3200" b="1" dirty="0" err="1">
                 <a:solidFill>
                   <a:srgbClr val="FFFFFF"/>
                 </a:solidFill>
@@ -4201,12 +5085,18 @@
               </a:rPr>
               <a:t>汇报完毕，感谢聆听</a:t>
             </a:r>
+            <a:endParaRPr sz="3200" b="1" dirty="0">
+              <a:solidFill>
+                <a:srgbClr val="FFFFFF"/>
+              </a:solidFill>
+              <a:latin typeface="SimSun"/>
+            </a:endParaRPr>
           </a:p>
         </p:txBody>
       </p:sp>
       <p:cxnSp>
         <p:nvCxnSpPr>
-          <p:cNvPr id="5" name="Connector 4"/>
+          <p:cNvPr id="3" name="Connector 2"/>
           <p:cNvCxnSpPr/>
           <p:nvPr/>
         </p:nvCxnSpPr>
@@ -4241,7 +5131,7 @@
       </p:cxnSp>
       <p:sp>
         <p:nvSpPr>
-          <p:cNvPr id="6" name="TextBox 5"/>
+          <p:cNvPr id="4" name="TextBox 3"/>
           <p:cNvSpPr txBox="1"/>
           <p:nvPr/>
         </p:nvSpPr>
@@ -4276,7 +5166,7 @@
       </p:sp>
       <p:sp>
         <p:nvSpPr>
-          <p:cNvPr id="7" name="TextBox 6"/>
+          <p:cNvPr id="5" name="TextBox 4"/>
           <p:cNvSpPr txBox="1"/>
           <p:nvPr/>
         </p:nvSpPr>
@@ -4549,7 +5439,7 @@
         </p:nvSpPr>
         <p:spPr>
           <a:xfrm>
-            <a:off x="914400" y="1865376"/>
+            <a:off x="914400" y="1819656"/>
             <a:ext cx="640080" cy="310896"/>
           </a:xfrm>
           <a:prstGeom prst="rect">
@@ -4584,7 +5474,7 @@
         </p:nvSpPr>
         <p:spPr>
           <a:xfrm>
-            <a:off x="1691640" y="1828800"/>
+            <a:off x="1691640" y="1783080"/>
             <a:ext cx="1645920" cy="329184"/>
           </a:xfrm>
           <a:prstGeom prst="rect">
@@ -4619,7 +5509,7 @@
         </p:nvSpPr>
         <p:spPr>
           <a:xfrm>
-            <a:off x="3063240" y="1856231"/>
+            <a:off x="3063240" y="1810512"/>
             <a:ext cx="6217920" cy="310896"/>
           </a:xfrm>
           <a:prstGeom prst="rect">
@@ -4654,7 +5544,7 @@
         </p:nvCxnSpPr>
         <p:spPr>
           <a:xfrm>
-            <a:off x="914400" y="2340864"/>
+            <a:off x="914400" y="2295144"/>
             <a:ext cx="8961120" cy="0"/>
           </a:xfrm>
           <a:prstGeom prst="line">
@@ -4689,7 +5579,7 @@
         </p:nvSpPr>
         <p:spPr>
           <a:xfrm>
-            <a:off x="914400" y="2642616"/>
+            <a:off x="914400" y="2478024"/>
             <a:ext cx="640080" cy="310896"/>
           </a:xfrm>
           <a:prstGeom prst="rect">
@@ -4724,7 +5614,7 @@
         </p:nvSpPr>
         <p:spPr>
           <a:xfrm>
-            <a:off x="1691640" y="2606040"/>
+            <a:off x="1691640" y="2441448"/>
             <a:ext cx="1645920" cy="329184"/>
           </a:xfrm>
           <a:prstGeom prst="rect">
@@ -4759,7 +5649,7 @@
         </p:nvSpPr>
         <p:spPr>
           <a:xfrm>
-            <a:off x="3063240" y="2633472"/>
+            <a:off x="3063240" y="2468879"/>
             <a:ext cx="6217920" cy="310896"/>
           </a:xfrm>
           <a:prstGeom prst="rect">
@@ -4794,7 +5684,7 @@
         </p:nvCxnSpPr>
         <p:spPr>
           <a:xfrm>
-            <a:off x="914400" y="3118104"/>
+            <a:off x="914400" y="2953512"/>
             <a:ext cx="8961120" cy="0"/>
           </a:xfrm>
           <a:prstGeom prst="line">
@@ -4829,7 +5719,7 @@
         </p:nvSpPr>
         <p:spPr>
           <a:xfrm>
-            <a:off x="914400" y="3419856"/>
+            <a:off x="914400" y="3136391"/>
             <a:ext cx="640080" cy="310896"/>
           </a:xfrm>
           <a:prstGeom prst="rect">
@@ -4864,7 +5754,7 @@
         </p:nvSpPr>
         <p:spPr>
           <a:xfrm>
-            <a:off x="1691640" y="3383280"/>
+            <a:off x="1691640" y="3099815"/>
             <a:ext cx="1645920" cy="329184"/>
           </a:xfrm>
           <a:prstGeom prst="rect">
@@ -4899,7 +5789,7 @@
         </p:nvSpPr>
         <p:spPr>
           <a:xfrm>
-            <a:off x="3063240" y="3410712"/>
+            <a:off x="3063240" y="3127247"/>
             <a:ext cx="6217920" cy="310896"/>
           </a:xfrm>
           <a:prstGeom prst="rect">
@@ -4934,7 +5824,7 @@
         </p:nvCxnSpPr>
         <p:spPr>
           <a:xfrm>
-            <a:off x="914400" y="3895344"/>
+            <a:off x="914400" y="3611879"/>
             <a:ext cx="8961120" cy="0"/>
           </a:xfrm>
           <a:prstGeom prst="line">
@@ -4969,7 +5859,7 @@
         </p:nvSpPr>
         <p:spPr>
           <a:xfrm>
-            <a:off x="914400" y="4197096"/>
+            <a:off x="914400" y="3794759"/>
             <a:ext cx="640080" cy="310896"/>
           </a:xfrm>
           <a:prstGeom prst="rect">
@@ -5004,7 +5894,7 @@
         </p:nvSpPr>
         <p:spPr>
           <a:xfrm>
-            <a:off x="1691640" y="4160520"/>
+            <a:off x="1691640" y="3758183"/>
             <a:ext cx="1645920" cy="329184"/>
           </a:xfrm>
           <a:prstGeom prst="rect">
@@ -5039,7 +5929,7 @@
         </p:nvSpPr>
         <p:spPr>
           <a:xfrm>
-            <a:off x="3063240" y="4187952"/>
+            <a:off x="3063240" y="3785615"/>
             <a:ext cx="6217920" cy="310896"/>
           </a:xfrm>
           <a:prstGeom prst="rect">
@@ -5074,7 +5964,7 @@
         </p:nvCxnSpPr>
         <p:spPr>
           <a:xfrm>
-            <a:off x="914400" y="4672583"/>
+            <a:off x="914400" y="4270248"/>
             <a:ext cx="8961120" cy="0"/>
           </a:xfrm>
           <a:prstGeom prst="line">
@@ -5109,7 +5999,7 @@
         </p:nvSpPr>
         <p:spPr>
           <a:xfrm>
-            <a:off x="914400" y="4974336"/>
+            <a:off x="914400" y="4453127"/>
             <a:ext cx="640080" cy="310896"/>
           </a:xfrm>
           <a:prstGeom prst="rect">
@@ -5144,7 +6034,7 @@
         </p:nvSpPr>
         <p:spPr>
           <a:xfrm>
-            <a:off x="1691640" y="4937759"/>
+            <a:off x="1691640" y="4416551"/>
             <a:ext cx="1645920" cy="329184"/>
           </a:xfrm>
           <a:prstGeom prst="rect">
@@ -5179,7 +6069,7 @@
         </p:nvSpPr>
         <p:spPr>
           <a:xfrm>
-            <a:off x="3063240" y="4965192"/>
+            <a:off x="3063240" y="4443983"/>
             <a:ext cx="6217920" cy="310896"/>
           </a:xfrm>
           <a:prstGeom prst="rect">
@@ -5214,7 +6104,7 @@
         </p:nvCxnSpPr>
         <p:spPr>
           <a:xfrm>
-            <a:off x="914400" y="5449823"/>
+            <a:off x="914400" y="4928615"/>
             <a:ext cx="8961120" cy="0"/>
           </a:xfrm>
           <a:prstGeom prst="line">
@@ -5243,7 +6133,147 @@
       </p:cxnSp>
       <p:sp>
         <p:nvSpPr>
-          <p:cNvPr id="28" name="Rounded Rectangle 27"/>
+          <p:cNvPr id="28" name="TextBox 27"/>
+          <p:cNvSpPr txBox="1"/>
+          <p:nvPr/>
+        </p:nvSpPr>
+        <p:spPr>
+          <a:xfrm>
+            <a:off x="914400" y="5111495"/>
+            <a:ext cx="640080" cy="310896"/>
+          </a:xfrm>
+          <a:prstGeom prst="rect">
+            <a:avLst/>
+          </a:prstGeom>
+          <a:noFill/>
+        </p:spPr>
+        <p:txBody>
+          <a:bodyPr wrap="square" anchor="t">
+            <a:spAutoFit/>
+          </a:bodyPr>
+          <a:lstStyle/>
+          <a:p>
+            <a:pPr algn="l"/>
+            <a:r>
+              <a:rPr sz="1700" b="1">
+                <a:solidFill>
+                  <a:srgbClr val="C29748"/>
+                </a:solidFill>
+                <a:latin typeface="Microsoft YaHei"/>
+              </a:rPr>
+              <a:t>06</a:t>
+            </a:r>
+          </a:p>
+        </p:txBody>
+      </p:sp>
+      <p:sp>
+        <p:nvSpPr>
+          <p:cNvPr id="29" name="TextBox 28"/>
+          <p:cNvSpPr txBox="1"/>
+          <p:nvPr/>
+        </p:nvSpPr>
+        <p:spPr>
+          <a:xfrm>
+            <a:off x="1691640" y="5074919"/>
+            <a:ext cx="1645920" cy="329184"/>
+          </a:xfrm>
+          <a:prstGeom prst="rect">
+            <a:avLst/>
+          </a:prstGeom>
+          <a:noFill/>
+        </p:spPr>
+        <p:txBody>
+          <a:bodyPr wrap="square" anchor="t">
+            <a:spAutoFit/>
+          </a:bodyPr>
+          <a:lstStyle/>
+          <a:p>
+            <a:pPr algn="l"/>
+            <a:r>
+              <a:rPr sz="1600" b="1">
+                <a:solidFill>
+                  <a:srgbClr val="004650"/>
+                </a:solidFill>
+                <a:latin typeface="Microsoft YaHei"/>
+              </a:rPr>
+              <a:t>盲审回应</a:t>
+            </a:r>
+          </a:p>
+        </p:txBody>
+      </p:sp>
+      <p:sp>
+        <p:nvSpPr>
+          <p:cNvPr id="30" name="TextBox 29"/>
+          <p:cNvSpPr txBox="1"/>
+          <p:nvPr/>
+        </p:nvSpPr>
+        <p:spPr>
+          <a:xfrm>
+            <a:off x="3063240" y="5102351"/>
+            <a:ext cx="6217920" cy="310896"/>
+          </a:xfrm>
+          <a:prstGeom prst="rect">
+            <a:avLst/>
+          </a:prstGeom>
+          <a:noFill/>
+        </p:spPr>
+        <p:txBody>
+          <a:bodyPr wrap="square" anchor="t">
+            <a:spAutoFit/>
+          </a:bodyPr>
+          <a:lstStyle/>
+          <a:p>
+            <a:pPr algn="l"/>
+            <a:r>
+              <a:rPr sz="1300" b="0">
+                <a:solidFill>
+                  <a:srgbClr val="19242D"/>
+                </a:solidFill>
+                <a:latin typeface="Microsoft YaHei"/>
+              </a:rPr>
+              <a:t>修改重点与专家意见回应</a:t>
+            </a:r>
+          </a:p>
+        </p:txBody>
+      </p:sp>
+      <p:cxnSp>
+        <p:nvCxnSpPr>
+          <p:cNvPr id="31" name="Connector 30"/>
+          <p:cNvCxnSpPr/>
+          <p:nvPr/>
+        </p:nvCxnSpPr>
+        <p:spPr>
+          <a:xfrm>
+            <a:off x="914400" y="5586983"/>
+            <a:ext cx="8961120" cy="0"/>
+          </a:xfrm>
+          <a:prstGeom prst="line">
+            <a:avLst/>
+          </a:prstGeom>
+          <a:ln w="15240">
+            <a:solidFill>
+              <a:srgbClr val="D9E2E1"/>
+            </a:solidFill>
+          </a:ln>
+        </p:spPr>
+        <p:style>
+          <a:lnRef idx="2">
+            <a:schemeClr val="accent1"/>
+          </a:lnRef>
+          <a:fillRef idx="0">
+            <a:schemeClr val="accent1"/>
+          </a:fillRef>
+          <a:effectRef idx="1">
+            <a:schemeClr val="accent1"/>
+          </a:effectRef>
+          <a:fontRef idx="minor">
+            <a:schemeClr val="tx1"/>
+          </a:fontRef>
+        </p:style>
+      </p:cxnSp>
+      <p:sp>
+        <p:nvSpPr>
+          <p:cNvPr id="32" name="Rounded Rectangle 31"/>
           <p:cNvSpPr/>
           <p:nvPr/>
         </p:nvSpPr>
@@ -5295,7 +6325,7 @@
       </p:sp>
       <p:sp>
         <p:nvSpPr>
-          <p:cNvPr id="29" name="TextBox 28"/>
+          <p:cNvPr id="33" name="TextBox 32"/>
           <p:cNvSpPr txBox="1"/>
           <p:nvPr/>
         </p:nvSpPr>
